--- a/lessons/8-1/slides.pptx
+++ b/lessons/8-1/slides.pptx
@@ -10993,7 +10993,7 @@
       </p:sp>
       <p:sp>
         <p:nvSpPr>
-          <p:cNvPr id="20" name="Shape 18"/>
+          <p:cNvPr id="20" name="Text 18"/>
           <p:cNvSpPr/>
           <p:nvPr/>
         </p:nvSpPr>
@@ -11014,33 +11014,7 @@
             <a:solidFill>
               <a:srgbClr val="D6DBDF"/>
             </a:solidFill>
-            <a:prstDash val="solid"/>
           </a:ln>
-          <a:effectLst>
-            <a:outerShdw sx="100000" sy="100000" kx="0" ky="0" algn="bl" rotWithShape="0" blurRad="50800" dist="12700" dir="5400000">
-              <a:srgbClr val="1C2E42">
-                <a:alpha val="10000"/>
-              </a:srgbClr>
-            </a:outerShdw>
-          </a:effectLst>
-        </p:spPr>
-      </p:sp>
-      <p:sp>
-        <p:nvSpPr>
-          <p:cNvPr id="21" name="Text 19"/>
-          <p:cNvSpPr/>
-          <p:nvPr/>
-        </p:nvSpPr>
-        <p:spPr>
-          <a:xfrm>
-            <a:off x="685800" y="1481328"/>
-            <a:ext cx="1447800" cy="384048"/>
-          </a:xfrm>
-          <a:prstGeom prst="rect">
-            <a:avLst/>
-          </a:prstGeom>
-          <a:noFill/>
-          <a:ln/>
         </p:spPr>
         <p:txBody>
           <a:bodyPr wrap="square" rtlCol="0" anchor="ctr"/>
@@ -11050,7 +11024,7 @@
               <a:buNone/>
             </a:pPr>
             <a:r>
-              <a:rPr lang="en-US" sz="900" dirty="0">
+              <a:rPr lang="en-US" sz="900" b="1" dirty="0">
                 <a:solidFill>
                   <a:srgbClr val="17324D"/>
                 </a:solidFill>
@@ -11066,7 +11040,7 @@
       </p:sp>
       <p:sp>
         <p:nvSpPr>
-          <p:cNvPr id="22" name="Shape 20"/>
+          <p:cNvPr id="21" name="Text 19"/>
           <p:cNvSpPr/>
           <p:nvPr/>
         </p:nvSpPr>
@@ -11087,33 +11061,7 @@
             <a:solidFill>
               <a:srgbClr val="D6DBDF"/>
             </a:solidFill>
-            <a:prstDash val="solid"/>
           </a:ln>
-          <a:effectLst>
-            <a:outerShdw sx="100000" sy="100000" kx="0" ky="0" algn="bl" rotWithShape="0" blurRad="50800" dist="12700" dir="5400000">
-              <a:srgbClr val="1C2E42">
-                <a:alpha val="10000"/>
-              </a:srgbClr>
-            </a:outerShdw>
-          </a:effectLst>
-        </p:spPr>
-      </p:sp>
-      <p:sp>
-        <p:nvSpPr>
-          <p:cNvPr id="23" name="Text 21"/>
-          <p:cNvSpPr/>
-          <p:nvPr/>
-        </p:nvSpPr>
-        <p:spPr>
-          <a:xfrm>
-            <a:off x="2453640" y="1481328"/>
-            <a:ext cx="1447800" cy="384048"/>
-          </a:xfrm>
-          <a:prstGeom prst="rect">
-            <a:avLst/>
-          </a:prstGeom>
-          <a:noFill/>
-          <a:ln/>
         </p:spPr>
         <p:txBody>
           <a:bodyPr wrap="square" rtlCol="0" anchor="ctr"/>
@@ -11123,7 +11071,7 @@
               <a:buNone/>
             </a:pPr>
             <a:r>
-              <a:rPr lang="en-US" sz="900" dirty="0">
+              <a:rPr lang="en-US" sz="900" b="1" dirty="0">
                 <a:solidFill>
                   <a:srgbClr val="17324D"/>
                 </a:solidFill>
@@ -11139,7 +11087,7 @@
       </p:sp>
       <p:sp>
         <p:nvSpPr>
-          <p:cNvPr id="24" name="Shape 22"/>
+          <p:cNvPr id="22" name="Text 20"/>
           <p:cNvSpPr/>
           <p:nvPr/>
         </p:nvSpPr>
@@ -11160,33 +11108,7 @@
             <a:solidFill>
               <a:srgbClr val="D6DBDF"/>
             </a:solidFill>
-            <a:prstDash val="solid"/>
           </a:ln>
-          <a:effectLst>
-            <a:outerShdw sx="100000" sy="100000" kx="0" ky="0" algn="bl" rotWithShape="0" blurRad="50800" dist="12700" dir="5400000">
-              <a:srgbClr val="1C2E42">
-                <a:alpha val="10000"/>
-              </a:srgbClr>
-            </a:outerShdw>
-          </a:effectLst>
-        </p:spPr>
-      </p:sp>
-      <p:sp>
-        <p:nvSpPr>
-          <p:cNvPr id="25" name="Text 23"/>
-          <p:cNvSpPr/>
-          <p:nvPr/>
-        </p:nvSpPr>
-        <p:spPr>
-          <a:xfrm>
-            <a:off x="4221480" y="1481328"/>
-            <a:ext cx="1447800" cy="384048"/>
-          </a:xfrm>
-          <a:prstGeom prst="rect">
-            <a:avLst/>
-          </a:prstGeom>
-          <a:noFill/>
-          <a:ln/>
         </p:spPr>
         <p:txBody>
           <a:bodyPr wrap="square" rtlCol="0" anchor="ctr"/>
@@ -11196,7 +11118,7 @@
               <a:buNone/>
             </a:pPr>
             <a:r>
-              <a:rPr lang="en-US" sz="900" dirty="0">
+              <a:rPr lang="en-US" sz="900" b="1" dirty="0">
                 <a:solidFill>
                   <a:srgbClr val="17324D"/>
                 </a:solidFill>
@@ -11212,7 +11134,7 @@
       </p:sp>
       <p:sp>
         <p:nvSpPr>
-          <p:cNvPr id="26" name="Shape 24"/>
+          <p:cNvPr id="23" name="Text 21"/>
           <p:cNvSpPr/>
           <p:nvPr/>
         </p:nvSpPr>
@@ -11233,33 +11155,7 @@
             <a:solidFill>
               <a:srgbClr val="D6DBDF"/>
             </a:solidFill>
-            <a:prstDash val="solid"/>
           </a:ln>
-          <a:effectLst>
-            <a:outerShdw sx="100000" sy="100000" kx="0" ky="0" algn="bl" rotWithShape="0" blurRad="50800" dist="12700" dir="5400000">
-              <a:srgbClr val="1C2E42">
-                <a:alpha val="10000"/>
-              </a:srgbClr>
-            </a:outerShdw>
-          </a:effectLst>
-        </p:spPr>
-      </p:sp>
-      <p:sp>
-        <p:nvSpPr>
-          <p:cNvPr id="27" name="Text 25"/>
-          <p:cNvSpPr/>
-          <p:nvPr/>
-        </p:nvSpPr>
-        <p:spPr>
-          <a:xfrm>
-            <a:off x="685800" y="1975104"/>
-            <a:ext cx="1447800" cy="384048"/>
-          </a:xfrm>
-          <a:prstGeom prst="rect">
-            <a:avLst/>
-          </a:prstGeom>
-          <a:noFill/>
-          <a:ln/>
         </p:spPr>
         <p:txBody>
           <a:bodyPr wrap="square" rtlCol="0" anchor="ctr"/>
@@ -11269,7 +11165,7 @@
               <a:buNone/>
             </a:pPr>
             <a:r>
-              <a:rPr lang="en-US" sz="900" dirty="0">
+              <a:rPr lang="en-US" sz="900" b="1" dirty="0">
                 <a:solidFill>
                   <a:srgbClr val="17324D"/>
                 </a:solidFill>
@@ -11285,7 +11181,7 @@
       </p:sp>
       <p:sp>
         <p:nvSpPr>
-          <p:cNvPr id="28" name="Shape 26"/>
+          <p:cNvPr id="24" name="Text 22"/>
           <p:cNvSpPr/>
           <p:nvPr/>
         </p:nvSpPr>
@@ -11306,33 +11202,7 @@
             <a:solidFill>
               <a:srgbClr val="D6DBDF"/>
             </a:solidFill>
-            <a:prstDash val="solid"/>
           </a:ln>
-          <a:effectLst>
-            <a:outerShdw sx="100000" sy="100000" kx="0" ky="0" algn="bl" rotWithShape="0" blurRad="50800" dist="12700" dir="5400000">
-              <a:srgbClr val="1C2E42">
-                <a:alpha val="10000"/>
-              </a:srgbClr>
-            </a:outerShdw>
-          </a:effectLst>
-        </p:spPr>
-      </p:sp>
-      <p:sp>
-        <p:nvSpPr>
-          <p:cNvPr id="29" name="Text 27"/>
-          <p:cNvSpPr/>
-          <p:nvPr/>
-        </p:nvSpPr>
-        <p:spPr>
-          <a:xfrm>
-            <a:off x="2453640" y="1975104"/>
-            <a:ext cx="1447800" cy="384048"/>
-          </a:xfrm>
-          <a:prstGeom prst="rect">
-            <a:avLst/>
-          </a:prstGeom>
-          <a:noFill/>
-          <a:ln/>
         </p:spPr>
         <p:txBody>
           <a:bodyPr wrap="square" rtlCol="0" anchor="ctr"/>
@@ -11342,7 +11212,7 @@
               <a:buNone/>
             </a:pPr>
             <a:r>
-              <a:rPr lang="en-US" sz="900" dirty="0">
+              <a:rPr lang="en-US" sz="900" b="1" dirty="0">
                 <a:solidFill>
                   <a:srgbClr val="17324D"/>
                 </a:solidFill>
@@ -11358,7 +11228,7 @@
       </p:sp>
       <p:sp>
         <p:nvSpPr>
-          <p:cNvPr id="30" name="Shape 28"/>
+          <p:cNvPr id="25" name="Text 23"/>
           <p:cNvSpPr/>
           <p:nvPr/>
         </p:nvSpPr>
@@ -11379,33 +11249,7 @@
             <a:solidFill>
               <a:srgbClr val="D6DBDF"/>
             </a:solidFill>
-            <a:prstDash val="solid"/>
           </a:ln>
-          <a:effectLst>
-            <a:outerShdw sx="100000" sy="100000" kx="0" ky="0" algn="bl" rotWithShape="0" blurRad="50800" dist="12700" dir="5400000">
-              <a:srgbClr val="1C2E42">
-                <a:alpha val="10000"/>
-              </a:srgbClr>
-            </a:outerShdw>
-          </a:effectLst>
-        </p:spPr>
-      </p:sp>
-      <p:sp>
-        <p:nvSpPr>
-          <p:cNvPr id="31" name="Text 29"/>
-          <p:cNvSpPr/>
-          <p:nvPr/>
-        </p:nvSpPr>
-        <p:spPr>
-          <a:xfrm>
-            <a:off x="4221480" y="1975104"/>
-            <a:ext cx="1447800" cy="384048"/>
-          </a:xfrm>
-          <a:prstGeom prst="rect">
-            <a:avLst/>
-          </a:prstGeom>
-          <a:noFill/>
-          <a:ln/>
         </p:spPr>
         <p:txBody>
           <a:bodyPr wrap="square" rtlCol="0" anchor="ctr"/>
@@ -11415,7 +11259,7 @@
               <a:buNone/>
             </a:pPr>
             <a:r>
-              <a:rPr lang="en-US" sz="900" dirty="0">
+              <a:rPr lang="en-US" sz="900" b="1" dirty="0">
                 <a:solidFill>
                   <a:srgbClr val="17324D"/>
                 </a:solidFill>
@@ -11431,7 +11275,7 @@
       </p:sp>
       <p:sp>
         <p:nvSpPr>
-          <p:cNvPr id="32" name="Shape 30"/>
+          <p:cNvPr id="26" name="Shape 24"/>
           <p:cNvSpPr/>
           <p:nvPr/>
         </p:nvSpPr>
@@ -11465,7 +11309,7 @@
       </p:sp>
       <p:sp>
         <p:nvSpPr>
-          <p:cNvPr id="33" name="Text 31"/>
+          <p:cNvPr id="27" name="Text 25"/>
           <p:cNvSpPr/>
           <p:nvPr/>
         </p:nvSpPr>
@@ -11506,7 +11350,7 @@
       </p:sp>
       <p:sp>
         <p:nvSpPr>
-          <p:cNvPr id="34" name="Shape 32"/>
+          <p:cNvPr id="28" name="Shape 26"/>
           <p:cNvSpPr/>
           <p:nvPr/>
         </p:nvSpPr>
@@ -11540,7 +11384,7 @@
       </p:sp>
       <p:sp>
         <p:nvSpPr>
-          <p:cNvPr id="35" name="Text 33"/>
+          <p:cNvPr id="29" name="Text 27"/>
           <p:cNvSpPr/>
           <p:nvPr/>
         </p:nvSpPr>
@@ -11581,7 +11425,7 @@
       </p:sp>
       <p:sp>
         <p:nvSpPr>
-          <p:cNvPr id="36" name="Shape 34"/>
+          <p:cNvPr id="30" name="Shape 28"/>
           <p:cNvSpPr/>
           <p:nvPr/>
         </p:nvSpPr>
@@ -11615,7 +11459,7 @@
       </p:sp>
       <p:sp>
         <p:nvSpPr>
-          <p:cNvPr id="37" name="Text 35"/>
+          <p:cNvPr id="31" name="Text 29"/>
           <p:cNvSpPr/>
           <p:nvPr/>
         </p:nvSpPr>
@@ -11656,7 +11500,7 @@
       </p:sp>
       <p:sp>
         <p:nvSpPr>
-          <p:cNvPr id="38" name="Text 36"/>
+          <p:cNvPr id="32" name="Text 30"/>
           <p:cNvSpPr/>
           <p:nvPr/>
         </p:nvSpPr>
@@ -11695,7 +11539,7 @@
       </p:sp>
       <p:sp>
         <p:nvSpPr>
-          <p:cNvPr id="39" name="Shape 37"/>
+          <p:cNvPr id="33" name="Shape 31"/>
           <p:cNvSpPr/>
           <p:nvPr/>
         </p:nvSpPr>
@@ -11718,7 +11562,7 @@
       </p:sp>
       <p:sp>
         <p:nvSpPr>
-          <p:cNvPr id="40" name="Shape 38"/>
+          <p:cNvPr id="34" name="Shape 32"/>
           <p:cNvSpPr/>
           <p:nvPr/>
         </p:nvSpPr>
@@ -11741,7 +11585,7 @@
       </p:sp>
       <p:sp>
         <p:nvSpPr>
-          <p:cNvPr id="41" name="Shape 39"/>
+          <p:cNvPr id="35" name="Shape 33"/>
           <p:cNvSpPr/>
           <p:nvPr/>
         </p:nvSpPr>
@@ -11764,7 +11608,7 @@
       </p:sp>
       <p:sp>
         <p:nvSpPr>
-          <p:cNvPr id="42" name="Shape 40"/>
+          <p:cNvPr id="36" name="Shape 34"/>
           <p:cNvSpPr/>
           <p:nvPr/>
         </p:nvSpPr>
@@ -11787,7 +11631,7 @@
       </p:sp>
       <p:sp>
         <p:nvSpPr>
-          <p:cNvPr id="43" name="Shape 41"/>
+          <p:cNvPr id="37" name="Shape 35"/>
           <p:cNvSpPr/>
           <p:nvPr/>
         </p:nvSpPr>

--- a/lessons/8-1/slides.pptx
+++ b/lessons/8-1/slides.pptx
@@ -2584,7 +2584,7 @@
                 <a:ea typeface="Outfit" pitchFamily="34" charset="-122"/>
                 <a:cs typeface="Outfit" pitchFamily="34" charset="-120"/>
               </a:rPr>
-              <a:t>6.SP.1</a:t>
+              <a:t>6.DS.1</a:t>
             </a:r>
             <a:endParaRPr lang="en-US" sz="1000" dirty="0"/>
           </a:p>
@@ -3307,7 +3307,7 @@
                 <a:ea typeface="Outfit" pitchFamily="34" charset="-122"/>
                 <a:cs typeface="Outfit" pitchFamily="34" charset="-120"/>
               </a:rPr>
-              <a:t>6.SP.1</a:t>
+              <a:t>6.DS.1</a:t>
             </a:r>
             <a:endParaRPr lang="en-US" sz="900" dirty="0"/>
           </a:p>
@@ -4436,7 +4436,7 @@
                 <a:ea typeface="Outfit" pitchFamily="34" charset="-122"/>
                 <a:cs typeface="Outfit" pitchFamily="34" charset="-120"/>
               </a:rPr>
-              <a:t>6.SP.1</a:t>
+              <a:t>6.DS.1</a:t>
             </a:r>
             <a:endParaRPr lang="en-US" sz="900" dirty="0"/>
           </a:p>
@@ -5640,7 +5640,7 @@
                 <a:ea typeface="Outfit" pitchFamily="34" charset="-122"/>
                 <a:cs typeface="Outfit" pitchFamily="34" charset="-120"/>
               </a:rPr>
-              <a:t>6.SP.1</a:t>
+              <a:t>6.DS.1</a:t>
             </a:r>
             <a:endParaRPr lang="en-US" sz="900" dirty="0"/>
           </a:p>
@@ -6909,7 +6909,7 @@
                 <a:ea typeface="Outfit" pitchFamily="34" charset="-122"/>
                 <a:cs typeface="Outfit" pitchFamily="34" charset="-120"/>
               </a:rPr>
-              <a:t>6.SP.1</a:t>
+              <a:t>6.DS.1</a:t>
             </a:r>
             <a:endParaRPr lang="en-US" sz="900" dirty="0"/>
           </a:p>
@@ -8105,7 +8105,7 @@
                 <a:ea typeface="Outfit" pitchFamily="34" charset="-122"/>
                 <a:cs typeface="Outfit" pitchFamily="34" charset="-120"/>
               </a:rPr>
-              <a:t>6.SP.1</a:t>
+              <a:t>6.DS.1</a:t>
             </a:r>
             <a:endParaRPr lang="en-US" sz="900" dirty="0"/>
           </a:p>
@@ -9167,7 +9167,7 @@
                 <a:ea typeface="Outfit" pitchFamily="34" charset="-122"/>
                 <a:cs typeface="Outfit" pitchFamily="34" charset="-120"/>
               </a:rPr>
-              <a:t>6.SP.1</a:t>
+              <a:t>6.DS.1</a:t>
             </a:r>
             <a:endParaRPr lang="en-US" sz="900" dirty="0"/>
           </a:p>
@@ -9707,7 +9707,7 @@
                 <a:ea typeface="Hanken Grotesk" pitchFamily="34" charset="-122"/>
                 <a:cs typeface="Hanken Grotesk" pitchFamily="34" charset="-120"/>
               </a:rPr>
-              <a:t>Which of the following is a statistical question?</a:t>
+              <a:t>Which of these is a statistical question?</a:t>
             </a:r>
             <a:endParaRPr lang="en-US" sz="1050" dirty="0"/>
           </a:p>
@@ -10132,7 +10132,7 @@
                 <a:ea typeface="Outfit" pitchFamily="34" charset="-122"/>
                 <a:cs typeface="Outfit" pitchFamily="34" charset="-120"/>
               </a:rPr>
-              <a:t>6.SP.1</a:t>
+              <a:t>6.DS.1</a:t>
             </a:r>
             <a:endParaRPr lang="en-US" sz="900" dirty="0"/>
           </a:p>
@@ -11049,7 +11049,7 @@
                 <a:ea typeface="Outfit" pitchFamily="34" charset="-122"/>
                 <a:cs typeface="Outfit" pitchFamily="34" charset="-120"/>
               </a:rPr>
-              <a:t>6.SP.1</a:t>
+              <a:t>6.DS.1</a:t>
             </a:r>
             <a:endParaRPr lang="en-US" sz="900" dirty="0"/>
           </a:p>
@@ -12245,7 +12245,7 @@
                 <a:ea typeface="Outfit" pitchFamily="34" charset="-122"/>
                 <a:cs typeface="Outfit" pitchFamily="34" charset="-120"/>
               </a:rPr>
-              <a:t>6.SP.1</a:t>
+              <a:t>6.DS.1</a:t>
             </a:r>
             <a:endParaRPr lang="en-US" sz="900" dirty="0"/>
           </a:p>
@@ -13678,7 +13678,7 @@
                 <a:ea typeface="Outfit" pitchFamily="34" charset="-122"/>
                 <a:cs typeface="Outfit" pitchFamily="34" charset="-120"/>
               </a:rPr>
-              <a:t>6.SP.1</a:t>
+              <a:t>6.DS.1</a:t>
             </a:r>
             <a:endParaRPr lang="en-US" sz="900" dirty="0"/>
           </a:p>
@@ -14492,7 +14492,7 @@
                 <a:ea typeface="Outfit" pitchFamily="34" charset="-122"/>
                 <a:cs typeface="Outfit" pitchFamily="34" charset="-120"/>
               </a:rPr>
-              <a:t>6.SP.1</a:t>
+              <a:t>6.DS.1</a:t>
             </a:r>
             <a:endParaRPr lang="en-US" sz="900" dirty="0"/>
           </a:p>
@@ -15599,7 +15599,7 @@
                 <a:ea typeface="Outfit" pitchFamily="34" charset="-122"/>
                 <a:cs typeface="Outfit" pitchFamily="34" charset="-120"/>
               </a:rPr>
-              <a:t>6.SP.1</a:t>
+              <a:t>6.DS.1</a:t>
             </a:r>
             <a:endParaRPr lang="en-US" sz="900" dirty="0"/>
           </a:p>
@@ -16706,7 +16706,7 @@
                 <a:ea typeface="Outfit" pitchFamily="34" charset="-122"/>
                 <a:cs typeface="Outfit" pitchFamily="34" charset="-120"/>
               </a:rPr>
-              <a:t>6.SP.1</a:t>
+              <a:t>6.DS.1</a:t>
             </a:r>
             <a:endParaRPr lang="en-US" sz="900" dirty="0"/>
           </a:p>
@@ -17813,7 +17813,7 @@
                 <a:ea typeface="Outfit" pitchFamily="34" charset="-122"/>
                 <a:cs typeface="Outfit" pitchFamily="34" charset="-120"/>
               </a:rPr>
-              <a:t>6.SP.1</a:t>
+              <a:t>6.DS.1</a:t>
             </a:r>
             <a:endParaRPr lang="en-US" sz="900" dirty="0"/>
           </a:p>
@@ -18920,7 +18920,7 @@
                 <a:ea typeface="Outfit" pitchFamily="34" charset="-122"/>
                 <a:cs typeface="Outfit" pitchFamily="34" charset="-120"/>
               </a:rPr>
-              <a:t>6.SP.1</a:t>
+              <a:t>6.DS.1</a:t>
             </a:r>
             <a:endParaRPr lang="en-US" sz="900" dirty="0"/>
           </a:p>
@@ -19980,7 +19980,7 @@
                 <a:ea typeface="Outfit" pitchFamily="34" charset="-122"/>
                 <a:cs typeface="Outfit" pitchFamily="34" charset="-120"/>
               </a:rPr>
-              <a:t>6.SP.1</a:t>
+              <a:t>6.DS.1</a:t>
             </a:r>
             <a:endParaRPr lang="en-US" sz="900" dirty="0"/>
           </a:p>
@@ -20968,7 +20968,7 @@
                 <a:ea typeface="Outfit" pitchFamily="34" charset="-122"/>
                 <a:cs typeface="Outfit" pitchFamily="34" charset="-120"/>
               </a:rPr>
-              <a:t>6.SP.1</a:t>
+              <a:t>6.DS.1</a:t>
             </a:r>
             <a:endParaRPr lang="en-US" sz="900" dirty="0"/>
           </a:p>
